--- a/ppt/MH_Grade10/MH10_S28_Refraction_of_Light.pptx
+++ b/ppt/MH_Grade10/MH10_S28_Refraction_of_Light.pptx
@@ -5303,8 +5303,8 @@
         </p:nvSpPr>
         <p:spPr>
           <a:xfrm>
-            <a:off x="1143000" y="2057400"/>
-            <a:ext cx="5029200" cy="411480"/>
+            <a:off x="1188720" y="2103120"/>
+            <a:ext cx="5029200" cy="457200"/>
           </a:xfrm>
           <a:prstGeom prst="rect">
             <a:avLst/>
@@ -5338,8 +5338,8 @@
         </p:nvSpPr>
         <p:spPr>
           <a:xfrm>
-            <a:off x="1143000" y="2606040"/>
-            <a:ext cx="5074920" cy="3063240"/>
+            <a:off x="1188720" y="2697480"/>
+            <a:ext cx="5029200" cy="3108959"/>
           </a:xfrm>
           <a:prstGeom prst="rect">
             <a:avLst/>
@@ -5354,14 +5354,14 @@
           <a:p>
             <a:pPr algn="l">
               <a:lnSpc>
-                <a:spcPct val="105000"/>
+                <a:spcPct val="106000"/>
               </a:lnSpc>
               <a:spcAft>
                 <a:spcPts val="900"/>
               </a:spcAft>
             </a:pPr>
             <a:r>
-              <a:rPr sz="1500" b="1" i="0">
+              <a:rPr sz="1400" b="1" i="0">
                 <a:solidFill>
                   <a:srgbClr val="0A9396"/>
                 </a:solidFill>
@@ -5370,26 +5370,26 @@
               <a:t>•  </a:t>
             </a:r>
             <a:r>
-              <a:rPr sz="1500" b="0" i="0">
+              <a:rPr sz="1400" b="0" i="0">
                 <a:solidFill>
                   <a:srgbClr val="1D2433"/>
                 </a:solidFill>
                 <a:latin typeface="Calibri"/>
               </a:rPr>
-              <a:t>Light refracts twice — bending towards the normal on entering (air to glass) and away from the normal on leaving (glass to air).</a:t>
+              <a:t>Refracts twice — on entering and on leaving</a:t>
             </a:r>
           </a:p>
           <a:p>
             <a:pPr algn="l">
               <a:lnSpc>
-                <a:spcPct val="105000"/>
+                <a:spcPct val="106000"/>
               </a:lnSpc>
               <a:spcAft>
                 <a:spcPts val="900"/>
               </a:spcAft>
             </a:pPr>
             <a:r>
-              <a:rPr sz="1500" b="1" i="0">
+              <a:rPr sz="1400" b="1" i="0">
                 <a:solidFill>
                   <a:srgbClr val="0A9396"/>
                 </a:solidFill>
@@ -5398,26 +5398,26 @@
               <a:t>•  </a:t>
             </a:r>
             <a:r>
-              <a:rPr sz="1500" b="0" i="0">
+              <a:rPr sz="1400" b="0" i="0">
                 <a:solidFill>
                   <a:srgbClr val="1D2433"/>
                 </a:solidFill>
                 <a:latin typeface="Calibri"/>
               </a:rPr>
-              <a:t>The two parallel faces bend it by equal and opposite amounts, so the emergent ray is parallel to the incident ray.</a:t>
+              <a:t>Parallel faces bend it back by an equal amount</a:t>
             </a:r>
           </a:p>
           <a:p>
             <a:pPr algn="l">
               <a:lnSpc>
-                <a:spcPct val="105000"/>
+                <a:spcPct val="106000"/>
               </a:lnSpc>
               <a:spcAft>
                 <a:spcPts val="900"/>
               </a:spcAft>
             </a:pPr>
             <a:r>
-              <a:rPr sz="1500" b="1" i="0">
+              <a:rPr sz="1400" b="1" i="0">
                 <a:solidFill>
                   <a:srgbClr val="0A9396"/>
                 </a:solidFill>
@@ -5426,26 +5426,26 @@
               <a:t>•  </a:t>
             </a:r>
             <a:r>
-              <a:rPr sz="1500" b="0" i="0">
+              <a:rPr sz="1400" b="0" i="0">
                 <a:solidFill>
                   <a:srgbClr val="1D2433"/>
                 </a:solidFill>
                 <a:latin typeface="Calibri"/>
               </a:rPr>
-              <a:t>The emergent ray is only shifted sideways from the original path — this shift is called lateral displacement.</a:t>
+              <a:t>Emergent ray stays parallel to the incident ray</a:t>
             </a:r>
           </a:p>
           <a:p>
             <a:pPr algn="l">
               <a:lnSpc>
-                <a:spcPct val="105000"/>
+                <a:spcPct val="106000"/>
               </a:lnSpc>
               <a:spcAft>
                 <a:spcPts val="900"/>
               </a:spcAft>
             </a:pPr>
             <a:r>
-              <a:rPr sz="1500" b="1" i="0">
+              <a:rPr sz="1400" b="1" i="0">
                 <a:solidFill>
                   <a:srgbClr val="0A9396"/>
                 </a:solidFill>
@@ -5454,13 +5454,41 @@
               <a:t>•  </a:t>
             </a:r>
             <a:r>
-              <a:rPr sz="1500" b="0" i="0">
+              <a:rPr sz="1400" b="0" i="0">
                 <a:solidFill>
                   <a:srgbClr val="1D2433"/>
                 </a:solidFill>
                 <a:latin typeface="Calibri"/>
               </a:rPr>
-              <a:t>Lateral displacement increases with the thickness of the slab and the angle of incidence.</a:t>
+              <a:t>But shifted sideways — lateral displacement</a:t>
+            </a:r>
+          </a:p>
+          <a:p>
+            <a:pPr algn="l">
+              <a:lnSpc>
+                <a:spcPct val="106000"/>
+              </a:lnSpc>
+              <a:spcAft>
+                <a:spcPts val="900"/>
+              </a:spcAft>
+            </a:pPr>
+            <a:r>
+              <a:rPr sz="1400" b="1" i="0">
+                <a:solidFill>
+                  <a:srgbClr val="0A9396"/>
+                </a:solidFill>
+                <a:latin typeface="Calibri"/>
+              </a:rPr>
+              <a:t>•  </a:t>
+            </a:r>
+            <a:r>
+              <a:rPr sz="1400" b="0" i="0">
+                <a:solidFill>
+                  <a:srgbClr val="1D2433"/>
+                </a:solidFill>
+                <a:latin typeface="Calibri"/>
+              </a:rPr>
+              <a:t>Shift grows with slab thickness and angle of incidence</a:t>
             </a:r>
           </a:p>
         </p:txBody>
@@ -16972,7 +17000,7 @@
         </p:nvSpPr>
         <p:spPr>
           <a:xfrm>
-            <a:off x="640080" y="1828800"/>
+            <a:off x="640080" y="1874519"/>
             <a:ext cx="10881360" cy="4114800"/>
           </a:xfrm>
           <a:prstGeom prst="roundRect">
@@ -17018,165 +17046,422 @@
       </p:sp>
       <p:sp>
         <p:nvSpPr>
-          <p:cNvPr id="7" name="TextBox 6"/>
+          <p:cNvPr id="7" name="Rounded Rectangle 6"/>
+          <p:cNvSpPr/>
+          <p:nvPr/>
+        </p:nvSpPr>
+        <p:spPr>
+          <a:xfrm>
+            <a:off x="1051560" y="2381097"/>
+            <a:ext cx="100584" cy="545668"/>
+          </a:xfrm>
+          <a:prstGeom prst="roundRect">
+            <a:avLst>
+              <a:gd name="adj" fmla="val 50000"/>
+            </a:avLst>
+          </a:prstGeom>
+          <a:solidFill>
+            <a:srgbClr val="0A9396"/>
+          </a:solidFill>
+          <a:ln>
+            <a:noFill/>
+          </a:ln>
+          <a:effectLst/>
+        </p:spPr>
+        <p:style>
+          <a:lnRef idx="1">
+            <a:schemeClr val="accent1"/>
+          </a:lnRef>
+          <a:fillRef idx="3">
+            <a:schemeClr val="accent1"/>
+          </a:fillRef>
+          <a:effectRef idx="2">
+            <a:schemeClr val="accent1"/>
+          </a:effectRef>
+          <a:fontRef idx="minor">
+            <a:schemeClr val="lt1"/>
+          </a:fontRef>
+        </p:style>
+        <p:txBody>
+          <a:bodyPr rtlCol="0" anchor="ctr"/>
+          <a:lstStyle/>
+          <a:p>
+            <a:pPr algn="ctr"/>
+          </a:p>
+        </p:txBody>
+      </p:sp>
+      <p:sp>
+        <p:nvSpPr>
+          <p:cNvPr id="8" name="TextBox 7"/>
           <p:cNvSpPr txBox="1"/>
           <p:nvPr/>
         </p:nvSpPr>
         <p:spPr>
           <a:xfrm>
-            <a:off x="1005840" y="2103120"/>
-            <a:ext cx="10058400" cy="3657600"/>
-          </a:xfrm>
-          <a:prstGeom prst="rect">
-            <a:avLst/>
-          </a:prstGeom>
-          <a:noFill/>
-        </p:spPr>
-        <p:txBody>
-          <a:bodyPr wrap="square" anchor="t" lIns="0" rIns="0" tIns="0" bIns="0">
+            <a:off x="1371600" y="2240279"/>
+            <a:ext cx="9784080" cy="880109"/>
+          </a:xfrm>
+          <a:prstGeom prst="rect">
+            <a:avLst/>
+          </a:prstGeom>
+          <a:noFill/>
+        </p:spPr>
+        <p:txBody>
+          <a:bodyPr wrap="square" anchor="ctr" lIns="0" rIns="0" tIns="0" bIns="0">
             <a:spAutoFit/>
           </a:bodyPr>
           <a:lstStyle/>
           <a:p>
             <a:pPr algn="l">
               <a:lnSpc>
-                <a:spcPct val="105000"/>
+                <a:spcPct val="102000"/>
               </a:lnSpc>
               <a:spcAft>
-                <a:spcPts val="1100"/>
+                <a:spcPts val="300"/>
               </a:spcAft>
             </a:pPr>
             <a:r>
-              <a:rPr sz="1600" b="1" i="0">
-                <a:solidFill>
-                  <a:srgbClr val="0A9396"/>
-                </a:solidFill>
-                <a:latin typeface="Calibri"/>
-              </a:rPr>
-              <a:t>•  </a:t>
-            </a:r>
-            <a:r>
-              <a:rPr sz="1600" b="1" i="0">
+              <a:rPr sz="1700" b="1" i="0">
                 <a:solidFill>
                   <a:srgbClr val="1D2433"/>
                 </a:solidFill>
                 <a:latin typeface="Calibri"/>
               </a:rPr>
-              <a:t>Partial internal reflection  </a:t>
-            </a:r>
-            <a:r>
-              <a:rPr sz="1500" b="0" i="0">
-                <a:solidFill>
-                  <a:srgbClr val="6B7280"/>
-                </a:solidFill>
-                <a:latin typeface="Calibri"/>
-              </a:rPr>
-              <a:t>When light travels from a denser to a rarer medium at a small angle of incidence, most of it refracts out (bending away from the normal) while a small part is reflected back into the denser medium — this is partial internal reflection.</a:t>
+              <a:t>Partial internal reflection</a:t>
             </a:r>
           </a:p>
           <a:p>
             <a:pPr algn="l">
               <a:lnSpc>
-                <a:spcPct val="105000"/>
+                <a:spcPct val="102000"/>
               </a:lnSpc>
               <a:spcAft>
-                <a:spcPts val="1100"/>
+                <a:spcPts val="300"/>
               </a:spcAft>
             </a:pPr>
             <a:r>
-              <a:rPr sz="1600" b="1" i="0">
-                <a:solidFill>
-                  <a:srgbClr val="0A9396"/>
-                </a:solidFill>
-                <a:latin typeface="Calibri"/>
-              </a:rPr>
-              <a:t>•  </a:t>
-            </a:r>
-            <a:r>
-              <a:rPr sz="1600" b="1" i="0">
-                <a:solidFill>
-                  <a:srgbClr val="1D2433"/>
-                </a:solidFill>
-                <a:latin typeface="Calibri"/>
-              </a:rPr>
-              <a:t>As the angle increases  </a:t>
-            </a:r>
-            <a:r>
-              <a:rPr sz="1500" b="0" i="0">
+              <a:rPr sz="1350" b="0" i="0">
                 <a:solidFill>
                   <a:srgbClr val="6B7280"/>
                 </a:solidFill>
                 <a:latin typeface="Calibri"/>
               </a:rPr>
-              <a:t>As the angle of incidence in the denser medium is increased, the refracted ray bends more and more towards the boundary and grows fainter, while the reflected ray grows brighter.</a:t>
-            </a:r>
-          </a:p>
+              <a:t>When light travels from a denser to a rarer medium at a small angle of incidence, most of it refracts out (bending away from the normal) while a small part is reflected back into the denser medium — this is partial internal reflection.</a:t>
+            </a:r>
+          </a:p>
+        </p:txBody>
+      </p:sp>
+      <p:sp>
+        <p:nvSpPr>
+          <p:cNvPr id="9" name="Rounded Rectangle 8"/>
+          <p:cNvSpPr/>
+          <p:nvPr/>
+        </p:nvSpPr>
+        <p:spPr>
+          <a:xfrm>
+            <a:off x="1051560" y="3261207"/>
+            <a:ext cx="100584" cy="545668"/>
+          </a:xfrm>
+          <a:prstGeom prst="roundRect">
+            <a:avLst>
+              <a:gd name="adj" fmla="val 50000"/>
+            </a:avLst>
+          </a:prstGeom>
+          <a:solidFill>
+            <a:srgbClr val="F4801A"/>
+          </a:solidFill>
+          <a:ln>
+            <a:noFill/>
+          </a:ln>
+          <a:effectLst/>
+        </p:spPr>
+        <p:style>
+          <a:lnRef idx="1">
+            <a:schemeClr val="accent1"/>
+          </a:lnRef>
+          <a:fillRef idx="3">
+            <a:schemeClr val="accent1"/>
+          </a:fillRef>
+          <a:effectRef idx="2">
+            <a:schemeClr val="accent1"/>
+          </a:effectRef>
+          <a:fontRef idx="minor">
+            <a:schemeClr val="lt1"/>
+          </a:fontRef>
+        </p:style>
+        <p:txBody>
+          <a:bodyPr rtlCol="0" anchor="ctr"/>
+          <a:lstStyle/>
+          <a:p>
+            <a:pPr algn="ctr"/>
+          </a:p>
+        </p:txBody>
+      </p:sp>
+      <p:sp>
+        <p:nvSpPr>
+          <p:cNvPr id="10" name="TextBox 9"/>
+          <p:cNvSpPr txBox="1"/>
+          <p:nvPr/>
+        </p:nvSpPr>
+        <p:spPr>
+          <a:xfrm>
+            <a:off x="1371600" y="3120389"/>
+            <a:ext cx="9784080" cy="880109"/>
+          </a:xfrm>
+          <a:prstGeom prst="rect">
+            <a:avLst/>
+          </a:prstGeom>
+          <a:noFill/>
+        </p:spPr>
+        <p:txBody>
+          <a:bodyPr wrap="square" anchor="ctr" lIns="0" rIns="0" tIns="0" bIns="0">
+            <a:spAutoFit/>
+          </a:bodyPr>
+          <a:lstStyle/>
           <a:p>
             <a:pPr algn="l">
               <a:lnSpc>
-                <a:spcPct val="105000"/>
+                <a:spcPct val="102000"/>
               </a:lnSpc>
               <a:spcAft>
-                <a:spcPts val="1100"/>
+                <a:spcPts val="300"/>
               </a:spcAft>
             </a:pPr>
             <a:r>
-              <a:rPr sz="1600" b="1" i="0">
-                <a:solidFill>
-                  <a:srgbClr val="0A9396"/>
-                </a:solidFill>
-                <a:latin typeface="Calibri"/>
-              </a:rPr>
-              <a:t>•  </a:t>
-            </a:r>
-            <a:r>
-              <a:rPr sz="1600" b="1" i="0">
+              <a:rPr sz="1700" b="1" i="0">
                 <a:solidFill>
                   <a:srgbClr val="1D2433"/>
                 </a:solidFill>
                 <a:latin typeface="Calibri"/>
               </a:rPr>
-              <a:t>At the critical angle  </a:t>
-            </a:r>
-            <a:r>
-              <a:rPr sz="1500" b="0" i="0">
-                <a:solidFill>
-                  <a:srgbClr val="6B7280"/>
-                </a:solidFill>
-                <a:latin typeface="Calibri"/>
-              </a:rPr>
-              <a:t>The critical angle (C) is the angle of incidence in the denser medium for which the angle of refraction becomes 90°; the refracted ray just grazes along the surface.</a:t>
+              <a:t>As the angle increases</a:t>
             </a:r>
           </a:p>
           <a:p>
             <a:pPr algn="l">
               <a:lnSpc>
-                <a:spcPct val="105000"/>
+                <a:spcPct val="102000"/>
               </a:lnSpc>
               <a:spcAft>
-                <a:spcPts val="1100"/>
+                <a:spcPts val="300"/>
               </a:spcAft>
             </a:pPr>
             <a:r>
-              <a:rPr sz="1600" b="1" i="0">
-                <a:solidFill>
-                  <a:srgbClr val="0A9396"/>
-                </a:solidFill>
-                <a:latin typeface="Calibri"/>
-              </a:rPr>
-              <a:t>•  </a:t>
-            </a:r>
-            <a:r>
-              <a:rPr sz="1600" b="1" i="0">
+              <a:rPr sz="1350" b="0" i="0">
+                <a:solidFill>
+                  <a:srgbClr val="6B7280"/>
+                </a:solidFill>
+                <a:latin typeface="Calibri"/>
+              </a:rPr>
+              <a:t>As the angle of incidence in the denser medium is increased, the refracted ray bends more and more towards the boundary and grows fainter, while the reflected ray grows brighter.</a:t>
+            </a:r>
+          </a:p>
+        </p:txBody>
+      </p:sp>
+      <p:sp>
+        <p:nvSpPr>
+          <p:cNvPr id="11" name="Rounded Rectangle 10"/>
+          <p:cNvSpPr/>
+          <p:nvPr/>
+        </p:nvSpPr>
+        <p:spPr>
+          <a:xfrm>
+            <a:off x="1051560" y="4141317"/>
+            <a:ext cx="100584" cy="545668"/>
+          </a:xfrm>
+          <a:prstGeom prst="roundRect">
+            <a:avLst>
+              <a:gd name="adj" fmla="val 50000"/>
+            </a:avLst>
+          </a:prstGeom>
+          <a:solidFill>
+            <a:srgbClr val="6A4C93"/>
+          </a:solidFill>
+          <a:ln>
+            <a:noFill/>
+          </a:ln>
+          <a:effectLst/>
+        </p:spPr>
+        <p:style>
+          <a:lnRef idx="1">
+            <a:schemeClr val="accent1"/>
+          </a:lnRef>
+          <a:fillRef idx="3">
+            <a:schemeClr val="accent1"/>
+          </a:fillRef>
+          <a:effectRef idx="2">
+            <a:schemeClr val="accent1"/>
+          </a:effectRef>
+          <a:fontRef idx="minor">
+            <a:schemeClr val="lt1"/>
+          </a:fontRef>
+        </p:style>
+        <p:txBody>
+          <a:bodyPr rtlCol="0" anchor="ctr"/>
+          <a:lstStyle/>
+          <a:p>
+            <a:pPr algn="ctr"/>
+          </a:p>
+        </p:txBody>
+      </p:sp>
+      <p:sp>
+        <p:nvSpPr>
+          <p:cNvPr id="12" name="TextBox 11"/>
+          <p:cNvSpPr txBox="1"/>
+          <p:nvPr/>
+        </p:nvSpPr>
+        <p:spPr>
+          <a:xfrm>
+            <a:off x="1371600" y="4000500"/>
+            <a:ext cx="9784080" cy="880109"/>
+          </a:xfrm>
+          <a:prstGeom prst="rect">
+            <a:avLst/>
+          </a:prstGeom>
+          <a:noFill/>
+        </p:spPr>
+        <p:txBody>
+          <a:bodyPr wrap="square" anchor="ctr" lIns="0" rIns="0" tIns="0" bIns="0">
+            <a:spAutoFit/>
+          </a:bodyPr>
+          <a:lstStyle/>
+          <a:p>
+            <a:pPr algn="l">
+              <a:lnSpc>
+                <a:spcPct val="102000"/>
+              </a:lnSpc>
+              <a:spcAft>
+                <a:spcPts val="300"/>
+              </a:spcAft>
+            </a:pPr>
+            <a:r>
+              <a:rPr sz="1700" b="1" i="0">
                 <a:solidFill>
                   <a:srgbClr val="1D2433"/>
                 </a:solidFill>
                 <a:latin typeface="Calibri"/>
               </a:rPr>
-              <a:t>Beyond the critical angle  </a:t>
-            </a:r>
-            <a:r>
-              <a:rPr sz="1500" b="0" i="0">
+              <a:t>At the critical angle</a:t>
+            </a:r>
+          </a:p>
+          <a:p>
+            <a:pPr algn="l">
+              <a:lnSpc>
+                <a:spcPct val="102000"/>
+              </a:lnSpc>
+              <a:spcAft>
+                <a:spcPts val="300"/>
+              </a:spcAft>
+            </a:pPr>
+            <a:r>
+              <a:rPr sz="1350" b="0" i="0">
+                <a:solidFill>
+                  <a:srgbClr val="6B7280"/>
+                </a:solidFill>
+                <a:latin typeface="Calibri"/>
+              </a:rPr>
+              <a:t>The critical angle (C) is the angle of incidence in the denser medium for which the angle of refraction becomes 90°; the refracted ray just grazes along the surface.</a:t>
+            </a:r>
+          </a:p>
+        </p:txBody>
+      </p:sp>
+      <p:sp>
+        <p:nvSpPr>
+          <p:cNvPr id="13" name="Rounded Rectangle 12"/>
+          <p:cNvSpPr/>
+          <p:nvPr/>
+        </p:nvSpPr>
+        <p:spPr>
+          <a:xfrm>
+            <a:off x="1051560" y="5021427"/>
+            <a:ext cx="100584" cy="545668"/>
+          </a:xfrm>
+          <a:prstGeom prst="roundRect">
+            <a:avLst>
+              <a:gd name="adj" fmla="val 50000"/>
+            </a:avLst>
+          </a:prstGeom>
+          <a:solidFill>
+            <a:srgbClr val="E63946"/>
+          </a:solidFill>
+          <a:ln>
+            <a:noFill/>
+          </a:ln>
+          <a:effectLst/>
+        </p:spPr>
+        <p:style>
+          <a:lnRef idx="1">
+            <a:schemeClr val="accent1"/>
+          </a:lnRef>
+          <a:fillRef idx="3">
+            <a:schemeClr val="accent1"/>
+          </a:fillRef>
+          <a:effectRef idx="2">
+            <a:schemeClr val="accent1"/>
+          </a:effectRef>
+          <a:fontRef idx="minor">
+            <a:schemeClr val="lt1"/>
+          </a:fontRef>
+        </p:style>
+        <p:txBody>
+          <a:bodyPr rtlCol="0" anchor="ctr"/>
+          <a:lstStyle/>
+          <a:p>
+            <a:pPr algn="ctr"/>
+          </a:p>
+        </p:txBody>
+      </p:sp>
+      <p:sp>
+        <p:nvSpPr>
+          <p:cNvPr id="14" name="TextBox 13"/>
+          <p:cNvSpPr txBox="1"/>
+          <p:nvPr/>
+        </p:nvSpPr>
+        <p:spPr>
+          <a:xfrm>
+            <a:off x="1371600" y="4880609"/>
+            <a:ext cx="9784080" cy="880109"/>
+          </a:xfrm>
+          <a:prstGeom prst="rect">
+            <a:avLst/>
+          </a:prstGeom>
+          <a:noFill/>
+        </p:spPr>
+        <p:txBody>
+          <a:bodyPr wrap="square" anchor="ctr" lIns="0" rIns="0" tIns="0" bIns="0">
+            <a:spAutoFit/>
+          </a:bodyPr>
+          <a:lstStyle/>
+          <a:p>
+            <a:pPr algn="l">
+              <a:lnSpc>
+                <a:spcPct val="102000"/>
+              </a:lnSpc>
+              <a:spcAft>
+                <a:spcPts val="300"/>
+              </a:spcAft>
+            </a:pPr>
+            <a:r>
+              <a:rPr sz="1700" b="1" i="0">
+                <a:solidFill>
+                  <a:srgbClr val="1D2433"/>
+                </a:solidFill>
+                <a:latin typeface="Calibri"/>
+              </a:rPr>
+              <a:t>Beyond the critical angle</a:t>
+            </a:r>
+          </a:p>
+          <a:p>
+            <a:pPr algn="l">
+              <a:lnSpc>
+                <a:spcPct val="102000"/>
+              </a:lnSpc>
+              <a:spcAft>
+                <a:spcPts val="300"/>
+              </a:spcAft>
+            </a:pPr>
+            <a:r>
+              <a:rPr sz="1350" b="0" i="0">
                 <a:solidFill>
                   <a:srgbClr val="6B7280"/>
                 </a:solidFill>
@@ -17455,8 +17740,8 @@
         </p:nvSpPr>
         <p:spPr>
           <a:xfrm>
-            <a:off x="6019495" y="2057400"/>
-            <a:ext cx="5029200" cy="411480"/>
+            <a:off x="6065215" y="2103120"/>
+            <a:ext cx="5029200" cy="457200"/>
           </a:xfrm>
           <a:prstGeom prst="rect">
             <a:avLst/>
@@ -17490,8 +17775,8 @@
         </p:nvSpPr>
         <p:spPr>
           <a:xfrm>
-            <a:off x="6019495" y="2606040"/>
-            <a:ext cx="5074920" cy="3063240"/>
+            <a:off x="6065215" y="2697480"/>
+            <a:ext cx="5029200" cy="3108959"/>
           </a:xfrm>
           <a:prstGeom prst="rect">
             <a:avLst/>
@@ -17506,7 +17791,7 @@
           <a:p>
             <a:pPr algn="l">
               <a:lnSpc>
-                <a:spcPct val="105000"/>
+                <a:spcPct val="106000"/>
               </a:lnSpc>
               <a:spcAft>
                 <a:spcPts val="900"/>
@@ -17528,13 +17813,13 @@
                 </a:solidFill>
                 <a:latin typeface="Calibri"/>
               </a:rPr>
-              <a:t>Total internal reflection can occur only when both of these conditions are satisfied together:</a:t>
+              <a:t>Both conditions must hold together:</a:t>
             </a:r>
           </a:p>
           <a:p>
             <a:pPr algn="l">
               <a:lnSpc>
-                <a:spcPct val="105000"/>
+                <a:spcPct val="106000"/>
               </a:lnSpc>
               <a:spcAft>
                 <a:spcPts val="900"/>
@@ -17556,13 +17841,13 @@
                 </a:solidFill>
                 <a:latin typeface="Calibri"/>
               </a:rPr>
-              <a:t>1. Light must travel from an optically denser medium into an optically rarer medium (for example, from water or glass into air).</a:t>
+              <a:t>1. Denser medium → rarer medium (e.g. glass → air)</a:t>
             </a:r>
           </a:p>
           <a:p>
             <a:pPr algn="l">
               <a:lnSpc>
-                <a:spcPct val="105000"/>
+                <a:spcPct val="106000"/>
               </a:lnSpc>
               <a:spcAft>
                 <a:spcPts val="900"/>
@@ -17584,13 +17869,13 @@
                 </a:solidFill>
                 <a:latin typeface="Calibri"/>
               </a:rPr>
-              <a:t>2. The angle of incidence in the denser medium must be greater than the critical angle for that pair of media.</a:t>
+              <a:t>2. Angle of incidence &gt; critical angle</a:t>
             </a:r>
           </a:p>
           <a:p>
             <a:pPr algn="l">
               <a:lnSpc>
-                <a:spcPct val="105000"/>
+                <a:spcPct val="106000"/>
               </a:lnSpc>
               <a:spcAft>
                 <a:spcPts val="900"/>
@@ -17612,7 +17897,35 @@
                 </a:solidFill>
                 <a:latin typeface="Calibri"/>
               </a:rPr>
-              <a:t>When this happens, the boundary behaves like a perfect mirror — all the light energy is reflected back with none refracting out, as shown in the diagram.</a:t>
+              <a:t>Then no light refracts out — all is reflected</a:t>
+            </a:r>
+          </a:p>
+          <a:p>
+            <a:pPr algn="l">
+              <a:lnSpc>
+                <a:spcPct val="106000"/>
+              </a:lnSpc>
+              <a:spcAft>
+                <a:spcPts val="900"/>
+              </a:spcAft>
+            </a:pPr>
+            <a:r>
+              <a:rPr sz="1500" b="1" i="0">
+                <a:solidFill>
+                  <a:srgbClr val="0A9396"/>
+                </a:solidFill>
+                <a:latin typeface="Calibri"/>
+              </a:rPr>
+              <a:t>•  </a:t>
+            </a:r>
+            <a:r>
+              <a:rPr sz="1500" b="0" i="0">
+                <a:solidFill>
+                  <a:srgbClr val="1D2433"/>
+                </a:solidFill>
+                <a:latin typeface="Calibri"/>
+              </a:rPr>
+              <a:t>The boundary acts like a perfect mirror</a:t>
             </a:r>
           </a:p>
         </p:txBody>
@@ -19660,8 +19973,8 @@
         </p:nvSpPr>
         <p:spPr>
           <a:xfrm>
-            <a:off x="1143000" y="2057400"/>
-            <a:ext cx="5029200" cy="411480"/>
+            <a:off x="1188720" y="2103120"/>
+            <a:ext cx="5029200" cy="457200"/>
           </a:xfrm>
           <a:prstGeom prst="rect">
             <a:avLst/>
@@ -19695,8 +20008,8 @@
         </p:nvSpPr>
         <p:spPr>
           <a:xfrm>
-            <a:off x="1143000" y="2606040"/>
-            <a:ext cx="5074920" cy="3063240"/>
+            <a:off x="1188720" y="2697480"/>
+            <a:ext cx="5029200" cy="3108959"/>
           </a:xfrm>
           <a:prstGeom prst="rect">
             <a:avLst/>
@@ -19711,14 +20024,14 @@
           <a:p>
             <a:pPr algn="l">
               <a:lnSpc>
-                <a:spcPct val="105000"/>
+                <a:spcPct val="106000"/>
               </a:lnSpc>
               <a:spcAft>
                 <a:spcPts val="900"/>
               </a:spcAft>
             </a:pPr>
             <a:r>
-              <a:rPr sz="1500" b="1" i="0">
+              <a:rPr sz="1400" b="1" i="0">
                 <a:solidFill>
                   <a:srgbClr val="0A9396"/>
                 </a:solidFill>
@@ -19727,26 +20040,26 @@
               <a:t>•  </a:t>
             </a:r>
             <a:r>
-              <a:rPr sz="1500" b="0" i="0">
+              <a:rPr sz="1400" b="0" i="0">
                 <a:solidFill>
                   <a:srgbClr val="1D2433"/>
                 </a:solidFill>
                 <a:latin typeface="Calibri"/>
               </a:rPr>
-              <a:t>On a very hot day, the layer of air just above a road or a desert surface becomes much hotter — and hence much less dense — than the air above it.</a:t>
+              <a:t>Hot day → air near the ground is hot and rarer</a:t>
             </a:r>
           </a:p>
           <a:p>
             <a:pPr algn="l">
               <a:lnSpc>
-                <a:spcPct val="105000"/>
+                <a:spcPct val="106000"/>
               </a:lnSpc>
               <a:spcAft>
                 <a:spcPts val="900"/>
               </a:spcAft>
             </a:pPr>
             <a:r>
-              <a:rPr sz="1500" b="1" i="0">
+              <a:rPr sz="1400" b="1" i="0">
                 <a:solidFill>
                   <a:srgbClr val="0A9396"/>
                 </a:solidFill>
@@ -19755,26 +20068,26 @@
               <a:t>•  </a:t>
             </a:r>
             <a:r>
-              <a:rPr sz="1500" b="0" i="0">
+              <a:rPr sz="1400" b="0" i="0">
                 <a:solidFill>
                   <a:srgbClr val="1D2433"/>
                 </a:solidFill>
                 <a:latin typeface="Calibri"/>
               </a:rPr>
-              <a:t>Light from the sky travelling towards the ground is refracted more and more as it enters progressively rarer layers of hot air, bending it away from the normal at each layer.</a:t>
+              <a:t>Sky-light bends more through each hotter layer</a:t>
             </a:r>
           </a:p>
           <a:p>
             <a:pPr algn="l">
               <a:lnSpc>
-                <a:spcPct val="105000"/>
+                <a:spcPct val="106000"/>
               </a:lnSpc>
               <a:spcAft>
                 <a:spcPts val="900"/>
               </a:spcAft>
             </a:pPr>
             <a:r>
-              <a:rPr sz="1500" b="1" i="0">
+              <a:rPr sz="1400" b="1" i="0">
                 <a:solidFill>
                   <a:srgbClr val="0A9396"/>
                 </a:solidFill>
@@ -19783,26 +20096,26 @@
               <a:t>•  </a:t>
             </a:r>
             <a:r>
-              <a:rPr sz="1500" b="0" i="0">
+              <a:rPr sz="1400" b="0" i="0">
                 <a:solidFill>
                   <a:srgbClr val="1D2433"/>
                 </a:solidFill>
                 <a:latin typeface="Calibri"/>
               </a:rPr>
-              <a:t>Eventually the ray undergoes total internal reflection at the hottest layer and travels back up to an observer's eye.</a:t>
+              <a:t>It undergoes total internal reflection upward</a:t>
             </a:r>
           </a:p>
           <a:p>
             <a:pPr algn="l">
               <a:lnSpc>
-                <a:spcPct val="105000"/>
+                <a:spcPct val="106000"/>
               </a:lnSpc>
               <a:spcAft>
                 <a:spcPts val="900"/>
               </a:spcAft>
             </a:pPr>
             <a:r>
-              <a:rPr sz="1500" b="1" i="0">
+              <a:rPr sz="1400" b="1" i="0">
                 <a:solidFill>
                   <a:srgbClr val="0A9396"/>
                 </a:solidFill>
@@ -19811,13 +20124,41 @@
               <a:t>•  </a:t>
             </a:r>
             <a:r>
-              <a:rPr sz="1500" b="0" i="0">
+              <a:rPr sz="1400" b="0" i="0">
                 <a:solidFill>
                   <a:srgbClr val="1D2433"/>
                 </a:solidFill>
                 <a:latin typeface="Calibri"/>
               </a:rPr>
-              <a:t>The observer sees an inverted image of the sky on the road, which looks exactly like a pool of water.</a:t>
+              <a:t>We see an inverted patch of sky on the road</a:t>
+            </a:r>
+          </a:p>
+          <a:p>
+            <a:pPr algn="l">
+              <a:lnSpc>
+                <a:spcPct val="106000"/>
+              </a:lnSpc>
+              <a:spcAft>
+                <a:spcPts val="900"/>
+              </a:spcAft>
+            </a:pPr>
+            <a:r>
+              <a:rPr sz="1400" b="1" i="0">
+                <a:solidFill>
+                  <a:srgbClr val="0A9396"/>
+                </a:solidFill>
+                <a:latin typeface="Calibri"/>
+              </a:rPr>
+              <a:t>•  </a:t>
+            </a:r>
+            <a:r>
+              <a:rPr sz="1400" b="0" i="0">
+                <a:solidFill>
+                  <a:srgbClr val="1D2433"/>
+                </a:solidFill>
+                <a:latin typeface="Calibri"/>
+              </a:rPr>
+              <a:t>It looks just like a pool of water</a:t>
             </a:r>
           </a:p>
         </p:txBody>
@@ -20090,8 +20431,8 @@
         </p:nvSpPr>
         <p:spPr>
           <a:xfrm>
-            <a:off x="1143000" y="2057400"/>
-            <a:ext cx="5029200" cy="411480"/>
+            <a:off x="1188720" y="2103120"/>
+            <a:ext cx="5029200" cy="457200"/>
           </a:xfrm>
           <a:prstGeom prst="rect">
             <a:avLst/>
@@ -20125,8 +20466,8 @@
         </p:nvSpPr>
         <p:spPr>
           <a:xfrm>
-            <a:off x="1143000" y="2606040"/>
-            <a:ext cx="5074920" cy="3063240"/>
+            <a:off x="1188720" y="2697480"/>
+            <a:ext cx="5029200" cy="3108959"/>
           </a:xfrm>
           <a:prstGeom prst="rect">
             <a:avLst/>
@@ -20141,14 +20482,14 @@
           <a:p>
             <a:pPr algn="l">
               <a:lnSpc>
-                <a:spcPct val="105000"/>
+                <a:spcPct val="106000"/>
               </a:lnSpc>
               <a:spcAft>
                 <a:spcPts val="900"/>
               </a:spcAft>
             </a:pPr>
             <a:r>
-              <a:rPr sz="1500" b="1" i="0">
+              <a:rPr sz="1400" b="1" i="0">
                 <a:solidFill>
                   <a:srgbClr val="0A9396"/>
                 </a:solidFill>
@@ -20157,26 +20498,26 @@
               <a:t>•  </a:t>
             </a:r>
             <a:r>
-              <a:rPr sz="1500" b="0" i="0">
+              <a:rPr sz="1400" b="0" i="0">
                 <a:solidFill>
                   <a:srgbClr val="1D2433"/>
                 </a:solidFill>
                 <a:latin typeface="Calibri"/>
               </a:rPr>
-              <a:t>A prism is a transparent optical element with two triangular ends and three rectangular side faces; the two faces at which refraction takes place are its refracting surfaces, and the angle between them is the refracting angle (angle of the prism).</a:t>
+              <a:t>Two refractions at two non-parallel faces</a:t>
             </a:r>
           </a:p>
           <a:p>
             <a:pPr algn="l">
               <a:lnSpc>
-                <a:spcPct val="105000"/>
+                <a:spcPct val="106000"/>
               </a:lnSpc>
               <a:spcAft>
                 <a:spcPts val="900"/>
               </a:spcAft>
             </a:pPr>
             <a:r>
-              <a:rPr sz="1500" b="1" i="0">
+              <a:rPr sz="1400" b="1" i="0">
                 <a:solidFill>
                   <a:srgbClr val="0A9396"/>
                 </a:solidFill>
@@ -20185,26 +20526,26 @@
               <a:t>•  </a:t>
             </a:r>
             <a:r>
-              <a:rPr sz="1500" b="0" i="0">
+              <a:rPr sz="1400" b="0" i="0">
                 <a:solidFill>
                   <a:srgbClr val="1D2433"/>
                 </a:solidFill>
                 <a:latin typeface="Calibri"/>
               </a:rPr>
-              <a:t>A ray entering a prism refracts at the first surface and again at the second surface, and unlike a glass slab the two surfaces are not parallel, so the emergent ray is NOT parallel to the incident ray.</a:t>
+              <a:t>Angle between the faces = refracting angle</a:t>
             </a:r>
           </a:p>
           <a:p>
             <a:pPr algn="l">
               <a:lnSpc>
-                <a:spcPct val="105000"/>
+                <a:spcPct val="106000"/>
               </a:lnSpc>
               <a:spcAft>
                 <a:spcPts val="900"/>
               </a:spcAft>
             </a:pPr>
             <a:r>
-              <a:rPr sz="1500" b="1" i="0">
+              <a:rPr sz="1400" b="1" i="0">
                 <a:solidFill>
                   <a:srgbClr val="0A9396"/>
                 </a:solidFill>
@@ -20213,26 +20554,26 @@
               <a:t>•  </a:t>
             </a:r>
             <a:r>
-              <a:rPr sz="1500" b="0" i="0">
+              <a:rPr sz="1400" b="0" i="0">
                 <a:solidFill>
                   <a:srgbClr val="1D2433"/>
                 </a:solidFill>
                 <a:latin typeface="Calibri"/>
               </a:rPr>
-              <a:t>The ray is bent towards the base of the prism; the angle between the incident ray (produced forward) and the emergent ray (produced backward) is called the angle of deviation.</a:t>
+              <a:t>Emergent ray is NOT parallel to the incident ray</a:t>
             </a:r>
           </a:p>
           <a:p>
             <a:pPr algn="l">
               <a:lnSpc>
-                <a:spcPct val="105000"/>
+                <a:spcPct val="106000"/>
               </a:lnSpc>
               <a:spcAft>
                 <a:spcPts val="900"/>
               </a:spcAft>
             </a:pPr>
             <a:r>
-              <a:rPr sz="1500" b="1" i="0">
+              <a:rPr sz="1400" b="1" i="0">
                 <a:solidFill>
                   <a:srgbClr val="0A9396"/>
                 </a:solidFill>
@@ -20241,13 +20582,41 @@
               <a:t>•  </a:t>
             </a:r>
             <a:r>
-              <a:rPr sz="1500" b="0" i="0">
+              <a:rPr sz="1400" b="0" i="0">
                 <a:solidFill>
                   <a:srgbClr val="1D2433"/>
                 </a:solidFill>
                 <a:latin typeface="Calibri"/>
               </a:rPr>
-              <a:t>The angle of deviation depends on the angle of incidence, the refracting angle and the material of the prism.</a:t>
+              <a:t>The ray bends towards the base of the prism</a:t>
+            </a:r>
+          </a:p>
+          <a:p>
+            <a:pPr algn="l">
+              <a:lnSpc>
+                <a:spcPct val="106000"/>
+              </a:lnSpc>
+              <a:spcAft>
+                <a:spcPts val="900"/>
+              </a:spcAft>
+            </a:pPr>
+            <a:r>
+              <a:rPr sz="1400" b="1" i="0">
+                <a:solidFill>
+                  <a:srgbClr val="0A9396"/>
+                </a:solidFill>
+                <a:latin typeface="Calibri"/>
+              </a:rPr>
+              <a:t>•  </a:t>
+            </a:r>
+            <a:r>
+              <a:rPr sz="1400" b="0" i="0">
+                <a:solidFill>
+                  <a:srgbClr val="1D2433"/>
+                </a:solidFill>
+                <a:latin typeface="Calibri"/>
+              </a:rPr>
+              <a:t>This bending is the angle of deviation</a:t>
             </a:r>
           </a:p>
         </p:txBody>
@@ -20730,8 +21099,8 @@
         </p:nvSpPr>
         <p:spPr>
           <a:xfrm>
-            <a:off x="6019495" y="2057400"/>
-            <a:ext cx="5029200" cy="411480"/>
+            <a:off x="6065215" y="2103120"/>
+            <a:ext cx="5029200" cy="457200"/>
           </a:xfrm>
           <a:prstGeom prst="rect">
             <a:avLst/>
@@ -20765,8 +21134,8 @@
         </p:nvSpPr>
         <p:spPr>
           <a:xfrm>
-            <a:off x="6019495" y="2606040"/>
-            <a:ext cx="5074920" cy="3063240"/>
+            <a:off x="6065215" y="2697480"/>
+            <a:ext cx="5029200" cy="3108959"/>
           </a:xfrm>
           <a:prstGeom prst="rect">
             <a:avLst/>
@@ -20781,14 +21150,14 @@
           <a:p>
             <a:pPr algn="l">
               <a:lnSpc>
-                <a:spcPct val="105000"/>
+                <a:spcPct val="106000"/>
               </a:lnSpc>
               <a:spcAft>
                 <a:spcPts val="900"/>
               </a:spcAft>
             </a:pPr>
             <a:r>
-              <a:rPr sz="1500" b="1" i="0">
+              <a:rPr sz="1400" b="1" i="0">
                 <a:solidFill>
                   <a:srgbClr val="0A9396"/>
                 </a:solidFill>
@@ -20797,26 +21166,26 @@
               <a:t>•  </a:t>
             </a:r>
             <a:r>
-              <a:rPr sz="1500" b="0" i="0">
+              <a:rPr sz="1400" b="0" i="0">
                 <a:solidFill>
                   <a:srgbClr val="1D2433"/>
                 </a:solidFill>
                 <a:latin typeface="Calibri"/>
               </a:rPr>
-              <a:t>White light is a mixture of seven colours: violet, indigo, blue, green, yellow, orange and red (VIBGYOR).</a:t>
+              <a:t>White light = seven colours (VIBGYOR)</a:t>
             </a:r>
           </a:p>
           <a:p>
             <a:pPr algn="l">
               <a:lnSpc>
-                <a:spcPct val="105000"/>
+                <a:spcPct val="106000"/>
               </a:lnSpc>
               <a:spcAft>
                 <a:spcPts val="900"/>
               </a:spcAft>
             </a:pPr>
             <a:r>
-              <a:rPr sz="1500" b="1" i="0">
+              <a:rPr sz="1400" b="1" i="0">
                 <a:solidFill>
                   <a:srgbClr val="0A9396"/>
                 </a:solidFill>
@@ -20825,26 +21194,26 @@
               <a:t>•  </a:t>
             </a:r>
             <a:r>
-              <a:rPr sz="1500" b="0" i="0">
+              <a:rPr sz="1400" b="0" i="0">
                 <a:solidFill>
                   <a:srgbClr val="1D2433"/>
                 </a:solidFill>
                 <a:latin typeface="Calibri"/>
               </a:rPr>
-              <a:t>Each colour has a different wavelength, and a glass prism has a slightly different refractive index for each wavelength — violet is bent the most and red the least.</a:t>
+              <a:t>A prism bends each colour by a different amount</a:t>
             </a:r>
           </a:p>
           <a:p>
             <a:pPr algn="l">
               <a:lnSpc>
-                <a:spcPct val="105000"/>
+                <a:spcPct val="106000"/>
               </a:lnSpc>
               <a:spcAft>
                 <a:spcPts val="900"/>
               </a:spcAft>
             </a:pPr>
             <a:r>
-              <a:rPr sz="1500" b="1" i="0">
+              <a:rPr sz="1400" b="1" i="0">
                 <a:solidFill>
                   <a:srgbClr val="0A9396"/>
                 </a:solidFill>
@@ -20853,26 +21222,26 @@
               <a:t>•  </a:t>
             </a:r>
             <a:r>
-              <a:rPr sz="1500" b="0" i="0">
+              <a:rPr sz="1400" b="0" i="0">
                 <a:solidFill>
                   <a:srgbClr val="1D2433"/>
                 </a:solidFill>
                 <a:latin typeface="Calibri"/>
               </a:rPr>
-              <a:t>When white light passes through a prism, the different colours are refracted by different amounts and emerge separated as a band of colours called a spectrum.</a:t>
+              <a:t>Violet bends the most, red the least</a:t>
             </a:r>
           </a:p>
           <a:p>
             <a:pPr algn="l">
               <a:lnSpc>
-                <a:spcPct val="105000"/>
+                <a:spcPct val="106000"/>
               </a:lnSpc>
               <a:spcAft>
                 <a:spcPts val="900"/>
               </a:spcAft>
             </a:pPr>
             <a:r>
-              <a:rPr sz="1500" b="1" i="0">
+              <a:rPr sz="1400" b="1" i="0">
                 <a:solidFill>
                   <a:srgbClr val="0A9396"/>
                 </a:solidFill>
@@ -20881,13 +21250,41 @@
               <a:t>•  </a:t>
             </a:r>
             <a:r>
-              <a:rPr sz="1500" b="0" i="0">
+              <a:rPr sz="1400" b="0" i="0">
                 <a:solidFill>
                   <a:srgbClr val="1D2433"/>
                 </a:solidFill>
                 <a:latin typeface="Calibri"/>
               </a:rPr>
-              <a:t>This splitting of white light into its component colours is called dispersion.</a:t>
+              <a:t>The colours emerge as a band — a spectrum</a:t>
+            </a:r>
+          </a:p>
+          <a:p>
+            <a:pPr algn="l">
+              <a:lnSpc>
+                <a:spcPct val="106000"/>
+              </a:lnSpc>
+              <a:spcAft>
+                <a:spcPts val="900"/>
+              </a:spcAft>
+            </a:pPr>
+            <a:r>
+              <a:rPr sz="1400" b="1" i="0">
+                <a:solidFill>
+                  <a:srgbClr val="0A9396"/>
+                </a:solidFill>
+                <a:latin typeface="Calibri"/>
+              </a:rPr>
+              <a:t>•  </a:t>
+            </a:r>
+            <a:r>
+              <a:rPr sz="1400" b="0" i="0">
+                <a:solidFill>
+                  <a:srgbClr val="1D2433"/>
+                </a:solidFill>
+                <a:latin typeface="Calibri"/>
+              </a:rPr>
+              <a:t>This splitting of white light is called dispersion</a:t>
             </a:r>
           </a:p>
         </p:txBody>
@@ -21084,7 +21481,7 @@
         </p:nvSpPr>
         <p:spPr>
           <a:xfrm>
-            <a:off x="640080" y="1828800"/>
+            <a:off x="640080" y="1874519"/>
             <a:ext cx="10881360" cy="4114800"/>
           </a:xfrm>
           <a:prstGeom prst="roundRect">
@@ -21130,165 +21527,422 @@
       </p:sp>
       <p:sp>
         <p:nvSpPr>
-          <p:cNvPr id="7" name="TextBox 6"/>
+          <p:cNvPr id="7" name="Rounded Rectangle 6"/>
+          <p:cNvSpPr/>
+          <p:nvPr/>
+        </p:nvSpPr>
+        <p:spPr>
+          <a:xfrm>
+            <a:off x="1051560" y="2381097"/>
+            <a:ext cx="100584" cy="545668"/>
+          </a:xfrm>
+          <a:prstGeom prst="roundRect">
+            <a:avLst>
+              <a:gd name="adj" fmla="val 50000"/>
+            </a:avLst>
+          </a:prstGeom>
+          <a:solidFill>
+            <a:srgbClr val="0A9396"/>
+          </a:solidFill>
+          <a:ln>
+            <a:noFill/>
+          </a:ln>
+          <a:effectLst/>
+        </p:spPr>
+        <p:style>
+          <a:lnRef idx="1">
+            <a:schemeClr val="accent1"/>
+          </a:lnRef>
+          <a:fillRef idx="3">
+            <a:schemeClr val="accent1"/>
+          </a:fillRef>
+          <a:effectRef idx="2">
+            <a:schemeClr val="accent1"/>
+          </a:effectRef>
+          <a:fontRef idx="minor">
+            <a:schemeClr val="lt1"/>
+          </a:fontRef>
+        </p:style>
+        <p:txBody>
+          <a:bodyPr rtlCol="0" anchor="ctr"/>
+          <a:lstStyle/>
+          <a:p>
+            <a:pPr algn="ctr"/>
+          </a:p>
+        </p:txBody>
+      </p:sp>
+      <p:sp>
+        <p:nvSpPr>
+          <p:cNvPr id="8" name="TextBox 7"/>
           <p:cNvSpPr txBox="1"/>
           <p:nvPr/>
         </p:nvSpPr>
         <p:spPr>
           <a:xfrm>
-            <a:off x="1005840" y="2103120"/>
-            <a:ext cx="10058400" cy="3657600"/>
-          </a:xfrm>
-          <a:prstGeom prst="rect">
-            <a:avLst/>
-          </a:prstGeom>
-          <a:noFill/>
-        </p:spPr>
-        <p:txBody>
-          <a:bodyPr wrap="square" anchor="t" lIns="0" rIns="0" tIns="0" bIns="0">
+            <a:off x="1371600" y="2240279"/>
+            <a:ext cx="9784080" cy="880109"/>
+          </a:xfrm>
+          <a:prstGeom prst="rect">
+            <a:avLst/>
+          </a:prstGeom>
+          <a:noFill/>
+        </p:spPr>
+        <p:txBody>
+          <a:bodyPr wrap="square" anchor="ctr" lIns="0" rIns="0" tIns="0" bIns="0">
             <a:spAutoFit/>
           </a:bodyPr>
           <a:lstStyle/>
           <a:p>
             <a:pPr algn="l">
               <a:lnSpc>
-                <a:spcPct val="105000"/>
+                <a:spcPct val="102000"/>
               </a:lnSpc>
               <a:spcAft>
-                <a:spcPts val="1100"/>
+                <a:spcPts val="300"/>
               </a:spcAft>
             </a:pPr>
             <a:r>
-              <a:rPr sz="1600" b="1" i="0">
-                <a:solidFill>
-                  <a:srgbClr val="0A9396"/>
-                </a:solidFill>
-                <a:latin typeface="Calibri"/>
-              </a:rPr>
-              <a:t>•  </a:t>
-            </a:r>
-            <a:r>
-              <a:rPr sz="1600" b="1" i="0">
+              <a:rPr sz="1700" b="1" i="0">
                 <a:solidFill>
                   <a:srgbClr val="1D2433"/>
                 </a:solidFill>
                 <a:latin typeface="Calibri"/>
               </a:rPr>
-              <a:t>Denser air near the ground  </a:t>
-            </a:r>
-            <a:r>
-              <a:rPr sz="1500" b="0" i="0">
-                <a:solidFill>
-                  <a:srgbClr val="6B7280"/>
-                </a:solidFill>
-                <a:latin typeface="Calibri"/>
-              </a:rPr>
-              <a:t>The Earth's atmosphere is denser near the surface and gradually becomes rarer with height, so sunlight bends continuously as it passes down through it.</a:t>
+              <a:t>Denser air near the ground</a:t>
             </a:r>
           </a:p>
           <a:p>
             <a:pPr algn="l">
               <a:lnSpc>
-                <a:spcPct val="105000"/>
+                <a:spcPct val="102000"/>
               </a:lnSpc>
               <a:spcAft>
-                <a:spcPts val="1100"/>
+                <a:spcPts val="300"/>
               </a:spcAft>
             </a:pPr>
             <a:r>
-              <a:rPr sz="1600" b="1" i="0">
-                <a:solidFill>
-                  <a:srgbClr val="0A9396"/>
-                </a:solidFill>
-                <a:latin typeface="Calibri"/>
-              </a:rPr>
-              <a:t>•  </a:t>
-            </a:r>
-            <a:r>
-              <a:rPr sz="1600" b="1" i="0">
-                <a:solidFill>
-                  <a:srgbClr val="1D2433"/>
-                </a:solidFill>
-                <a:latin typeface="Calibri"/>
-              </a:rPr>
-              <a:t>Advance sunrise  </a:t>
-            </a:r>
-            <a:r>
-              <a:rPr sz="1500" b="0" i="0">
+              <a:rPr sz="1350" b="0" i="0">
                 <a:solidFill>
                   <a:srgbClr val="6B7280"/>
                 </a:solidFill>
                 <a:latin typeface="Calibri"/>
               </a:rPr>
-              <a:t>Because of this bending, the Sun's light reaches us even when the Sun is still slightly below the horizon, so we see the Sun about two minutes before it actually rises.</a:t>
-            </a:r>
-          </a:p>
+              <a:t>The Earth's atmosphere is denser near the surface and gradually becomes rarer with height, so sunlight bends continuously as it passes down through it.</a:t>
+            </a:r>
+          </a:p>
+        </p:txBody>
+      </p:sp>
+      <p:sp>
+        <p:nvSpPr>
+          <p:cNvPr id="9" name="Rounded Rectangle 8"/>
+          <p:cNvSpPr/>
+          <p:nvPr/>
+        </p:nvSpPr>
+        <p:spPr>
+          <a:xfrm>
+            <a:off x="1051560" y="3261207"/>
+            <a:ext cx="100584" cy="545668"/>
+          </a:xfrm>
+          <a:prstGeom prst="roundRect">
+            <a:avLst>
+              <a:gd name="adj" fmla="val 50000"/>
+            </a:avLst>
+          </a:prstGeom>
+          <a:solidFill>
+            <a:srgbClr val="F4801A"/>
+          </a:solidFill>
+          <a:ln>
+            <a:noFill/>
+          </a:ln>
+          <a:effectLst/>
+        </p:spPr>
+        <p:style>
+          <a:lnRef idx="1">
+            <a:schemeClr val="accent1"/>
+          </a:lnRef>
+          <a:fillRef idx="3">
+            <a:schemeClr val="accent1"/>
+          </a:fillRef>
+          <a:effectRef idx="2">
+            <a:schemeClr val="accent1"/>
+          </a:effectRef>
+          <a:fontRef idx="minor">
+            <a:schemeClr val="lt1"/>
+          </a:fontRef>
+        </p:style>
+        <p:txBody>
+          <a:bodyPr rtlCol="0" anchor="ctr"/>
+          <a:lstStyle/>
+          <a:p>
+            <a:pPr algn="ctr"/>
+          </a:p>
+        </p:txBody>
+      </p:sp>
+      <p:sp>
+        <p:nvSpPr>
+          <p:cNvPr id="10" name="TextBox 9"/>
+          <p:cNvSpPr txBox="1"/>
+          <p:nvPr/>
+        </p:nvSpPr>
+        <p:spPr>
+          <a:xfrm>
+            <a:off x="1371600" y="3120389"/>
+            <a:ext cx="9784080" cy="880109"/>
+          </a:xfrm>
+          <a:prstGeom prst="rect">
+            <a:avLst/>
+          </a:prstGeom>
+          <a:noFill/>
+        </p:spPr>
+        <p:txBody>
+          <a:bodyPr wrap="square" anchor="ctr" lIns="0" rIns="0" tIns="0" bIns="0">
+            <a:spAutoFit/>
+          </a:bodyPr>
+          <a:lstStyle/>
           <a:p>
             <a:pPr algn="l">
               <a:lnSpc>
-                <a:spcPct val="105000"/>
+                <a:spcPct val="102000"/>
               </a:lnSpc>
               <a:spcAft>
-                <a:spcPts val="1100"/>
+                <a:spcPts val="300"/>
               </a:spcAft>
             </a:pPr>
             <a:r>
-              <a:rPr sz="1600" b="1" i="0">
-                <a:solidFill>
-                  <a:srgbClr val="0A9396"/>
-                </a:solidFill>
-                <a:latin typeface="Calibri"/>
-              </a:rPr>
-              <a:t>•  </a:t>
-            </a:r>
-            <a:r>
-              <a:rPr sz="1600" b="1" i="0">
+              <a:rPr sz="1700" b="1" i="0">
                 <a:solidFill>
                   <a:srgbClr val="1D2433"/>
                 </a:solidFill>
                 <a:latin typeface="Calibri"/>
               </a:rPr>
-              <a:t>Delayed sunset  </a:t>
-            </a:r>
-            <a:r>
-              <a:rPr sz="1500" b="0" i="0">
-                <a:solidFill>
-                  <a:srgbClr val="6B7280"/>
-                </a:solidFill>
-                <a:latin typeface="Calibri"/>
-              </a:rPr>
-              <a:t>For the same reason, we continue to see the Sun for about two minutes after it has actually set below the horizon — giving roughly four extra minutes of daylight each day.</a:t>
+              <a:t>Advance sunrise</a:t>
             </a:r>
           </a:p>
           <a:p>
             <a:pPr algn="l">
               <a:lnSpc>
-                <a:spcPct val="105000"/>
+                <a:spcPct val="102000"/>
               </a:lnSpc>
               <a:spcAft>
-                <a:spcPts val="1100"/>
+                <a:spcPts val="300"/>
               </a:spcAft>
             </a:pPr>
             <a:r>
-              <a:rPr sz="1600" b="1" i="0">
-                <a:solidFill>
-                  <a:srgbClr val="0A9396"/>
-                </a:solidFill>
-                <a:latin typeface="Calibri"/>
-              </a:rPr>
-              <a:t>•  </a:t>
-            </a:r>
-            <a:r>
-              <a:rPr sz="1600" b="1" i="0">
+              <a:rPr sz="1350" b="0" i="0">
+                <a:solidFill>
+                  <a:srgbClr val="6B7280"/>
+                </a:solidFill>
+                <a:latin typeface="Calibri"/>
+              </a:rPr>
+              <a:t>Because of this bending, the Sun's light reaches us even when the Sun is still slightly below the horizon, so we see the Sun about two minutes before it actually rises.</a:t>
+            </a:r>
+          </a:p>
+        </p:txBody>
+      </p:sp>
+      <p:sp>
+        <p:nvSpPr>
+          <p:cNvPr id="11" name="Rounded Rectangle 10"/>
+          <p:cNvSpPr/>
+          <p:nvPr/>
+        </p:nvSpPr>
+        <p:spPr>
+          <a:xfrm>
+            <a:off x="1051560" y="4141317"/>
+            <a:ext cx="100584" cy="545668"/>
+          </a:xfrm>
+          <a:prstGeom prst="roundRect">
+            <a:avLst>
+              <a:gd name="adj" fmla="val 50000"/>
+            </a:avLst>
+          </a:prstGeom>
+          <a:solidFill>
+            <a:srgbClr val="6A4C93"/>
+          </a:solidFill>
+          <a:ln>
+            <a:noFill/>
+          </a:ln>
+          <a:effectLst/>
+        </p:spPr>
+        <p:style>
+          <a:lnRef idx="1">
+            <a:schemeClr val="accent1"/>
+          </a:lnRef>
+          <a:fillRef idx="3">
+            <a:schemeClr val="accent1"/>
+          </a:fillRef>
+          <a:effectRef idx="2">
+            <a:schemeClr val="accent1"/>
+          </a:effectRef>
+          <a:fontRef idx="minor">
+            <a:schemeClr val="lt1"/>
+          </a:fontRef>
+        </p:style>
+        <p:txBody>
+          <a:bodyPr rtlCol="0" anchor="ctr"/>
+          <a:lstStyle/>
+          <a:p>
+            <a:pPr algn="ctr"/>
+          </a:p>
+        </p:txBody>
+      </p:sp>
+      <p:sp>
+        <p:nvSpPr>
+          <p:cNvPr id="12" name="TextBox 11"/>
+          <p:cNvSpPr txBox="1"/>
+          <p:nvPr/>
+        </p:nvSpPr>
+        <p:spPr>
+          <a:xfrm>
+            <a:off x="1371600" y="4000500"/>
+            <a:ext cx="9784080" cy="880109"/>
+          </a:xfrm>
+          <a:prstGeom prst="rect">
+            <a:avLst/>
+          </a:prstGeom>
+          <a:noFill/>
+        </p:spPr>
+        <p:txBody>
+          <a:bodyPr wrap="square" anchor="ctr" lIns="0" rIns="0" tIns="0" bIns="0">
+            <a:spAutoFit/>
+          </a:bodyPr>
+          <a:lstStyle/>
+          <a:p>
+            <a:pPr algn="l">
+              <a:lnSpc>
+                <a:spcPct val="102000"/>
+              </a:lnSpc>
+              <a:spcAft>
+                <a:spcPts val="300"/>
+              </a:spcAft>
+            </a:pPr>
+            <a:r>
+              <a:rPr sz="1700" b="1" i="0">
                 <a:solidFill>
                   <a:srgbClr val="1D2433"/>
                 </a:solidFill>
                 <a:latin typeface="Calibri"/>
               </a:rPr>
-              <a:t>Oval-shaped Sun  </a:t>
-            </a:r>
-            <a:r>
-              <a:rPr sz="1500" b="0" i="0">
+              <a:t>Delayed sunset</a:t>
+            </a:r>
+          </a:p>
+          <a:p>
+            <a:pPr algn="l">
+              <a:lnSpc>
+                <a:spcPct val="102000"/>
+              </a:lnSpc>
+              <a:spcAft>
+                <a:spcPts val="300"/>
+              </a:spcAft>
+            </a:pPr>
+            <a:r>
+              <a:rPr sz="1350" b="0" i="0">
+                <a:solidFill>
+                  <a:srgbClr val="6B7280"/>
+                </a:solidFill>
+                <a:latin typeface="Calibri"/>
+              </a:rPr>
+              <a:t>For the same reason, we continue to see the Sun for about two minutes after it has actually set below the horizon — giving roughly four extra minutes of daylight each day.</a:t>
+            </a:r>
+          </a:p>
+        </p:txBody>
+      </p:sp>
+      <p:sp>
+        <p:nvSpPr>
+          <p:cNvPr id="13" name="Rounded Rectangle 12"/>
+          <p:cNvSpPr/>
+          <p:nvPr/>
+        </p:nvSpPr>
+        <p:spPr>
+          <a:xfrm>
+            <a:off x="1051560" y="5021427"/>
+            <a:ext cx="100584" cy="545668"/>
+          </a:xfrm>
+          <a:prstGeom prst="roundRect">
+            <a:avLst>
+              <a:gd name="adj" fmla="val 50000"/>
+            </a:avLst>
+          </a:prstGeom>
+          <a:solidFill>
+            <a:srgbClr val="E63946"/>
+          </a:solidFill>
+          <a:ln>
+            <a:noFill/>
+          </a:ln>
+          <a:effectLst/>
+        </p:spPr>
+        <p:style>
+          <a:lnRef idx="1">
+            <a:schemeClr val="accent1"/>
+          </a:lnRef>
+          <a:fillRef idx="3">
+            <a:schemeClr val="accent1"/>
+          </a:fillRef>
+          <a:effectRef idx="2">
+            <a:schemeClr val="accent1"/>
+          </a:effectRef>
+          <a:fontRef idx="minor">
+            <a:schemeClr val="lt1"/>
+          </a:fontRef>
+        </p:style>
+        <p:txBody>
+          <a:bodyPr rtlCol="0" anchor="ctr"/>
+          <a:lstStyle/>
+          <a:p>
+            <a:pPr algn="ctr"/>
+          </a:p>
+        </p:txBody>
+      </p:sp>
+      <p:sp>
+        <p:nvSpPr>
+          <p:cNvPr id="14" name="TextBox 13"/>
+          <p:cNvSpPr txBox="1"/>
+          <p:nvPr/>
+        </p:nvSpPr>
+        <p:spPr>
+          <a:xfrm>
+            <a:off x="1371600" y="4880609"/>
+            <a:ext cx="9784080" cy="880109"/>
+          </a:xfrm>
+          <a:prstGeom prst="rect">
+            <a:avLst/>
+          </a:prstGeom>
+          <a:noFill/>
+        </p:spPr>
+        <p:txBody>
+          <a:bodyPr wrap="square" anchor="ctr" lIns="0" rIns="0" tIns="0" bIns="0">
+            <a:spAutoFit/>
+          </a:bodyPr>
+          <a:lstStyle/>
+          <a:p>
+            <a:pPr algn="l">
+              <a:lnSpc>
+                <a:spcPct val="102000"/>
+              </a:lnSpc>
+              <a:spcAft>
+                <a:spcPts val="300"/>
+              </a:spcAft>
+            </a:pPr>
+            <a:r>
+              <a:rPr sz="1700" b="1" i="0">
+                <a:solidFill>
+                  <a:srgbClr val="1D2433"/>
+                </a:solidFill>
+                <a:latin typeface="Calibri"/>
+              </a:rPr>
+              <a:t>Oval-shaped Sun</a:t>
+            </a:r>
+          </a:p>
+          <a:p>
+            <a:pPr algn="l">
+              <a:lnSpc>
+                <a:spcPct val="102000"/>
+              </a:lnSpc>
+              <a:spcAft>
+                <a:spcPts val="300"/>
+              </a:spcAft>
+            </a:pPr>
+            <a:r>
+              <a:rPr sz="1350" b="0" i="0">
                 <a:solidFill>
                   <a:srgbClr val="6B7280"/>
                 </a:solidFill>
@@ -21491,7 +22145,7 @@
         </p:nvSpPr>
         <p:spPr>
           <a:xfrm>
-            <a:off x="640080" y="1828800"/>
+            <a:off x="640080" y="1874519"/>
             <a:ext cx="10881360" cy="4114800"/>
           </a:xfrm>
           <a:prstGeom prst="roundRect">
@@ -21537,202 +22191,529 @@
       </p:sp>
       <p:sp>
         <p:nvSpPr>
-          <p:cNvPr id="7" name="TextBox 6"/>
+          <p:cNvPr id="7" name="Rounded Rectangle 6"/>
+          <p:cNvSpPr/>
+          <p:nvPr/>
+        </p:nvSpPr>
+        <p:spPr>
+          <a:xfrm>
+            <a:off x="1051560" y="2352934"/>
+            <a:ext cx="100584" cy="436534"/>
+          </a:xfrm>
+          <a:prstGeom prst="roundRect">
+            <a:avLst>
+              <a:gd name="adj" fmla="val 50000"/>
+            </a:avLst>
+          </a:prstGeom>
+          <a:solidFill>
+            <a:srgbClr val="0A9396"/>
+          </a:solidFill>
+          <a:ln>
+            <a:noFill/>
+          </a:ln>
+          <a:effectLst/>
+        </p:spPr>
+        <p:style>
+          <a:lnRef idx="1">
+            <a:schemeClr val="accent1"/>
+          </a:lnRef>
+          <a:fillRef idx="3">
+            <a:schemeClr val="accent1"/>
+          </a:fillRef>
+          <a:effectRef idx="2">
+            <a:schemeClr val="accent1"/>
+          </a:effectRef>
+          <a:fontRef idx="minor">
+            <a:schemeClr val="lt1"/>
+          </a:fontRef>
+        </p:style>
+        <p:txBody>
+          <a:bodyPr rtlCol="0" anchor="ctr"/>
+          <a:lstStyle/>
+          <a:p>
+            <a:pPr algn="ctr"/>
+          </a:p>
+        </p:txBody>
+      </p:sp>
+      <p:sp>
+        <p:nvSpPr>
+          <p:cNvPr id="8" name="TextBox 7"/>
           <p:cNvSpPr txBox="1"/>
           <p:nvPr/>
         </p:nvSpPr>
         <p:spPr>
           <a:xfrm>
-            <a:off x="1005840" y="2103120"/>
-            <a:ext cx="10058400" cy="3657600"/>
-          </a:xfrm>
-          <a:prstGeom prst="rect">
-            <a:avLst/>
-          </a:prstGeom>
-          <a:noFill/>
-        </p:spPr>
-        <p:txBody>
-          <a:bodyPr wrap="square" anchor="t" lIns="0" rIns="0" tIns="0" bIns="0">
+            <a:off x="1371600" y="2240279"/>
+            <a:ext cx="9784080" cy="704087"/>
+          </a:xfrm>
+          <a:prstGeom prst="rect">
+            <a:avLst/>
+          </a:prstGeom>
+          <a:noFill/>
+        </p:spPr>
+        <p:txBody>
+          <a:bodyPr wrap="square" anchor="ctr" lIns="0" rIns="0" tIns="0" bIns="0">
             <a:spAutoFit/>
           </a:bodyPr>
           <a:lstStyle/>
           <a:p>
             <a:pPr algn="l">
               <a:lnSpc>
-                <a:spcPct val="105000"/>
+                <a:spcPct val="102000"/>
               </a:lnSpc>
               <a:spcAft>
-                <a:spcPts val="1100"/>
+                <a:spcPts val="300"/>
               </a:spcAft>
             </a:pPr>
             <a:r>
-              <a:rPr sz="1600" b="1" i="0">
-                <a:solidFill>
-                  <a:srgbClr val="0A9396"/>
-                </a:solidFill>
-                <a:latin typeface="Calibri"/>
-              </a:rPr>
-              <a:t>•  </a:t>
-            </a:r>
-            <a:r>
-              <a:rPr sz="1600" b="1" i="0">
+              <a:rPr sz="1700" b="1" i="0">
                 <a:solidFill>
                   <a:srgbClr val="1D2433"/>
                 </a:solidFill>
                 <a:latin typeface="Calibri"/>
               </a:rPr>
-              <a:t>Atmospheric refraction  </a:t>
-            </a:r>
-            <a:r>
-              <a:rPr sz="1500" b="0" i="0">
-                <a:solidFill>
-                  <a:srgbClr val="6B7280"/>
-                </a:solidFill>
-                <a:latin typeface="Calibri"/>
-              </a:rPr>
-              <a:t>Starlight enters the Earth's atmosphere and passes through air layers of continuously changing density and temperature before reaching our eyes.</a:t>
+              <a:t>Atmospheric refraction</a:t>
             </a:r>
           </a:p>
           <a:p>
             <a:pPr algn="l">
               <a:lnSpc>
-                <a:spcPct val="105000"/>
+                <a:spcPct val="102000"/>
               </a:lnSpc>
               <a:spcAft>
-                <a:spcPts val="1100"/>
+                <a:spcPts val="300"/>
               </a:spcAft>
             </a:pPr>
             <a:r>
-              <a:rPr sz="1600" b="1" i="0">
-                <a:solidFill>
-                  <a:srgbClr val="0A9396"/>
-                </a:solidFill>
-                <a:latin typeface="Calibri"/>
-              </a:rPr>
-              <a:t>•  </a:t>
-            </a:r>
-            <a:r>
-              <a:rPr sz="1600" b="1" i="0">
-                <a:solidFill>
-                  <a:srgbClr val="1D2433"/>
-                </a:solidFill>
-                <a:latin typeface="Calibri"/>
-              </a:rPr>
-              <a:t>Continuous bending  </a:t>
-            </a:r>
-            <a:r>
-              <a:rPr sz="1500" b="0" i="0">
+              <a:rPr sz="1350" b="0" i="0">
                 <a:solidFill>
                   <a:srgbClr val="6B7280"/>
                 </a:solidFill>
                 <a:latin typeface="Calibri"/>
               </a:rPr>
-              <a:t>Because the atmosphere has no sharp boundaries, the light bends gradually and does not travel in a single straight line — it follows a slightly curved path.</a:t>
-            </a:r>
-          </a:p>
+              <a:t>Starlight enters the Earth's atmosphere and passes through air layers of continuously changing density and temperature before reaching our eyes.</a:t>
+            </a:r>
+          </a:p>
+        </p:txBody>
+      </p:sp>
+      <p:sp>
+        <p:nvSpPr>
+          <p:cNvPr id="9" name="Rounded Rectangle 8"/>
+          <p:cNvSpPr/>
+          <p:nvPr/>
+        </p:nvSpPr>
+        <p:spPr>
+          <a:xfrm>
+            <a:off x="1051560" y="3057022"/>
+            <a:ext cx="100584" cy="436534"/>
+          </a:xfrm>
+          <a:prstGeom prst="roundRect">
+            <a:avLst>
+              <a:gd name="adj" fmla="val 50000"/>
+            </a:avLst>
+          </a:prstGeom>
+          <a:solidFill>
+            <a:srgbClr val="F4801A"/>
+          </a:solidFill>
+          <a:ln>
+            <a:noFill/>
+          </a:ln>
+          <a:effectLst/>
+        </p:spPr>
+        <p:style>
+          <a:lnRef idx="1">
+            <a:schemeClr val="accent1"/>
+          </a:lnRef>
+          <a:fillRef idx="3">
+            <a:schemeClr val="accent1"/>
+          </a:fillRef>
+          <a:effectRef idx="2">
+            <a:schemeClr val="accent1"/>
+          </a:effectRef>
+          <a:fontRef idx="minor">
+            <a:schemeClr val="lt1"/>
+          </a:fontRef>
+        </p:style>
+        <p:txBody>
+          <a:bodyPr rtlCol="0" anchor="ctr"/>
+          <a:lstStyle/>
+          <a:p>
+            <a:pPr algn="ctr"/>
+          </a:p>
+        </p:txBody>
+      </p:sp>
+      <p:sp>
+        <p:nvSpPr>
+          <p:cNvPr id="10" name="TextBox 9"/>
+          <p:cNvSpPr txBox="1"/>
+          <p:nvPr/>
+        </p:nvSpPr>
+        <p:spPr>
+          <a:xfrm>
+            <a:off x="1371600" y="2944368"/>
+            <a:ext cx="9784080" cy="704087"/>
+          </a:xfrm>
+          <a:prstGeom prst="rect">
+            <a:avLst/>
+          </a:prstGeom>
+          <a:noFill/>
+        </p:spPr>
+        <p:txBody>
+          <a:bodyPr wrap="square" anchor="ctr" lIns="0" rIns="0" tIns="0" bIns="0">
+            <a:spAutoFit/>
+          </a:bodyPr>
+          <a:lstStyle/>
           <a:p>
             <a:pPr algn="l">
               <a:lnSpc>
-                <a:spcPct val="105000"/>
+                <a:spcPct val="102000"/>
               </a:lnSpc>
               <a:spcAft>
-                <a:spcPts val="1100"/>
+                <a:spcPts val="300"/>
               </a:spcAft>
             </a:pPr>
             <a:r>
-              <a:rPr sz="1600" b="1" i="0">
-                <a:solidFill>
-                  <a:srgbClr val="0A9396"/>
-                </a:solidFill>
-                <a:latin typeface="Calibri"/>
-              </a:rPr>
-              <a:t>•  </a:t>
-            </a:r>
-            <a:r>
-              <a:rPr sz="1600" b="1" i="0">
+              <a:rPr sz="1700" b="1" i="0">
                 <a:solidFill>
                   <a:srgbClr val="1D2433"/>
                 </a:solidFill>
                 <a:latin typeface="Calibri"/>
               </a:rPr>
-              <a:t>Fluctuating refractive index  </a:t>
-            </a:r>
-            <a:r>
-              <a:rPr sz="1500" b="0" i="0">
-                <a:solidFill>
-                  <a:srgbClr val="6B7280"/>
-                </a:solidFill>
-                <a:latin typeface="Calibri"/>
-              </a:rPr>
-              <a:t>Air currents constantly change the density of the layers, so the amount of bending keeps changing from moment to moment.</a:t>
+              <a:t>Continuous bending</a:t>
             </a:r>
           </a:p>
           <a:p>
             <a:pPr algn="l">
               <a:lnSpc>
-                <a:spcPct val="105000"/>
+                <a:spcPct val="102000"/>
               </a:lnSpc>
               <a:spcAft>
-                <a:spcPts val="1100"/>
+                <a:spcPts val="300"/>
               </a:spcAft>
             </a:pPr>
             <a:r>
-              <a:rPr sz="1600" b="1" i="0">
-                <a:solidFill>
-                  <a:srgbClr val="0A9396"/>
-                </a:solidFill>
-                <a:latin typeface="Calibri"/>
-              </a:rPr>
-              <a:t>•  </a:t>
-            </a:r>
-            <a:r>
-              <a:rPr sz="1600" b="1" i="0">
-                <a:solidFill>
-                  <a:srgbClr val="1D2433"/>
-                </a:solidFill>
-                <a:latin typeface="Calibri"/>
-              </a:rPr>
-              <a:t>Apparent flickering  </a:t>
-            </a:r>
-            <a:r>
-              <a:rPr sz="1500" b="0" i="0">
+              <a:rPr sz="1350" b="0" i="0">
                 <a:solidFill>
                   <a:srgbClr val="6B7280"/>
                 </a:solidFill>
                 <a:latin typeface="Calibri"/>
               </a:rPr>
-              <a:t>This makes the star's apparent position and brightness fluctuate rapidly, which we see as twinkling.</a:t>
-            </a:r>
-          </a:p>
+              <a:t>Because the atmosphere has no sharp boundaries, the light bends gradually and does not travel in a single straight line — it follows a slightly curved path.</a:t>
+            </a:r>
+          </a:p>
+        </p:txBody>
+      </p:sp>
+      <p:sp>
+        <p:nvSpPr>
+          <p:cNvPr id="11" name="Rounded Rectangle 10"/>
+          <p:cNvSpPr/>
+          <p:nvPr/>
+        </p:nvSpPr>
+        <p:spPr>
+          <a:xfrm>
+            <a:off x="1051560" y="3761110"/>
+            <a:ext cx="100584" cy="436534"/>
+          </a:xfrm>
+          <a:prstGeom prst="roundRect">
+            <a:avLst>
+              <a:gd name="adj" fmla="val 50000"/>
+            </a:avLst>
+          </a:prstGeom>
+          <a:solidFill>
+            <a:srgbClr val="6A4C93"/>
+          </a:solidFill>
+          <a:ln>
+            <a:noFill/>
+          </a:ln>
+          <a:effectLst/>
+        </p:spPr>
+        <p:style>
+          <a:lnRef idx="1">
+            <a:schemeClr val="accent1"/>
+          </a:lnRef>
+          <a:fillRef idx="3">
+            <a:schemeClr val="accent1"/>
+          </a:fillRef>
+          <a:effectRef idx="2">
+            <a:schemeClr val="accent1"/>
+          </a:effectRef>
+          <a:fontRef idx="minor">
+            <a:schemeClr val="lt1"/>
+          </a:fontRef>
+        </p:style>
+        <p:txBody>
+          <a:bodyPr rtlCol="0" anchor="ctr"/>
+          <a:lstStyle/>
+          <a:p>
+            <a:pPr algn="ctr"/>
+          </a:p>
+        </p:txBody>
+      </p:sp>
+      <p:sp>
+        <p:nvSpPr>
+          <p:cNvPr id="12" name="TextBox 11"/>
+          <p:cNvSpPr txBox="1"/>
+          <p:nvPr/>
+        </p:nvSpPr>
+        <p:spPr>
+          <a:xfrm>
+            <a:off x="1371600" y="3648455"/>
+            <a:ext cx="9784080" cy="704087"/>
+          </a:xfrm>
+          <a:prstGeom prst="rect">
+            <a:avLst/>
+          </a:prstGeom>
+          <a:noFill/>
+        </p:spPr>
+        <p:txBody>
+          <a:bodyPr wrap="square" anchor="ctr" lIns="0" rIns="0" tIns="0" bIns="0">
+            <a:spAutoFit/>
+          </a:bodyPr>
+          <a:lstStyle/>
           <a:p>
             <a:pPr algn="l">
               <a:lnSpc>
-                <a:spcPct val="105000"/>
+                <a:spcPct val="102000"/>
               </a:lnSpc>
               <a:spcAft>
-                <a:spcPts val="1100"/>
+                <a:spcPts val="300"/>
               </a:spcAft>
             </a:pPr>
             <a:r>
-              <a:rPr sz="1600" b="1" i="0">
-                <a:solidFill>
-                  <a:srgbClr val="0A9396"/>
-                </a:solidFill>
-                <a:latin typeface="Calibri"/>
-              </a:rPr>
-              <a:t>•  </a:t>
-            </a:r>
-            <a:r>
-              <a:rPr sz="1600" b="1" i="0">
+              <a:rPr sz="1700" b="1" i="0">
                 <a:solidFill>
                   <a:srgbClr val="1D2433"/>
                 </a:solidFill>
                 <a:latin typeface="Calibri"/>
               </a:rPr>
-              <a:t>Planets do not twinkle noticeably  </a:t>
-            </a:r>
-            <a:r>
-              <a:rPr sz="1500" b="0" i="0">
+              <a:t>Fluctuating refractive index</a:t>
+            </a:r>
+          </a:p>
+          <a:p>
+            <a:pPr algn="l">
+              <a:lnSpc>
+                <a:spcPct val="102000"/>
+              </a:lnSpc>
+              <a:spcAft>
+                <a:spcPts val="300"/>
+              </a:spcAft>
+            </a:pPr>
+            <a:r>
+              <a:rPr sz="1350" b="0" i="0">
+                <a:solidFill>
+                  <a:srgbClr val="6B7280"/>
+                </a:solidFill>
+                <a:latin typeface="Calibri"/>
+              </a:rPr>
+              <a:t>Air currents constantly change the density of the layers, so the amount of bending keeps changing from moment to moment.</a:t>
+            </a:r>
+          </a:p>
+        </p:txBody>
+      </p:sp>
+      <p:sp>
+        <p:nvSpPr>
+          <p:cNvPr id="13" name="Rounded Rectangle 12"/>
+          <p:cNvSpPr/>
+          <p:nvPr/>
+        </p:nvSpPr>
+        <p:spPr>
+          <a:xfrm>
+            <a:off x="1051560" y="4465198"/>
+            <a:ext cx="100584" cy="436534"/>
+          </a:xfrm>
+          <a:prstGeom prst="roundRect">
+            <a:avLst>
+              <a:gd name="adj" fmla="val 50000"/>
+            </a:avLst>
+          </a:prstGeom>
+          <a:solidFill>
+            <a:srgbClr val="E63946"/>
+          </a:solidFill>
+          <a:ln>
+            <a:noFill/>
+          </a:ln>
+          <a:effectLst/>
+        </p:spPr>
+        <p:style>
+          <a:lnRef idx="1">
+            <a:schemeClr val="accent1"/>
+          </a:lnRef>
+          <a:fillRef idx="3">
+            <a:schemeClr val="accent1"/>
+          </a:fillRef>
+          <a:effectRef idx="2">
+            <a:schemeClr val="accent1"/>
+          </a:effectRef>
+          <a:fontRef idx="minor">
+            <a:schemeClr val="lt1"/>
+          </a:fontRef>
+        </p:style>
+        <p:txBody>
+          <a:bodyPr rtlCol="0" anchor="ctr"/>
+          <a:lstStyle/>
+          <a:p>
+            <a:pPr algn="ctr"/>
+          </a:p>
+        </p:txBody>
+      </p:sp>
+      <p:sp>
+        <p:nvSpPr>
+          <p:cNvPr id="14" name="TextBox 13"/>
+          <p:cNvSpPr txBox="1"/>
+          <p:nvPr/>
+        </p:nvSpPr>
+        <p:spPr>
+          <a:xfrm>
+            <a:off x="1371600" y="4352544"/>
+            <a:ext cx="9784080" cy="704087"/>
+          </a:xfrm>
+          <a:prstGeom prst="rect">
+            <a:avLst/>
+          </a:prstGeom>
+          <a:noFill/>
+        </p:spPr>
+        <p:txBody>
+          <a:bodyPr wrap="square" anchor="ctr" lIns="0" rIns="0" tIns="0" bIns="0">
+            <a:spAutoFit/>
+          </a:bodyPr>
+          <a:lstStyle/>
+          <a:p>
+            <a:pPr algn="l">
+              <a:lnSpc>
+                <a:spcPct val="102000"/>
+              </a:lnSpc>
+              <a:spcAft>
+                <a:spcPts val="300"/>
+              </a:spcAft>
+            </a:pPr>
+            <a:r>
+              <a:rPr sz="1700" b="1" i="0">
+                <a:solidFill>
+                  <a:srgbClr val="1D2433"/>
+                </a:solidFill>
+                <a:latin typeface="Calibri"/>
+              </a:rPr>
+              <a:t>Apparent flickering</a:t>
+            </a:r>
+          </a:p>
+          <a:p>
+            <a:pPr algn="l">
+              <a:lnSpc>
+                <a:spcPct val="102000"/>
+              </a:lnSpc>
+              <a:spcAft>
+                <a:spcPts val="300"/>
+              </a:spcAft>
+            </a:pPr>
+            <a:r>
+              <a:rPr sz="1350" b="0" i="0">
+                <a:solidFill>
+                  <a:srgbClr val="6B7280"/>
+                </a:solidFill>
+                <a:latin typeface="Calibri"/>
+              </a:rPr>
+              <a:t>This makes the star's apparent position and brightness fluctuate rapidly, which we see as twinkling.</a:t>
+            </a:r>
+          </a:p>
+        </p:txBody>
+      </p:sp>
+      <p:sp>
+        <p:nvSpPr>
+          <p:cNvPr id="15" name="Rounded Rectangle 14"/>
+          <p:cNvSpPr/>
+          <p:nvPr/>
+        </p:nvSpPr>
+        <p:spPr>
+          <a:xfrm>
+            <a:off x="1051560" y="5169286"/>
+            <a:ext cx="100584" cy="436534"/>
+          </a:xfrm>
+          <a:prstGeom prst="roundRect">
+            <a:avLst>
+              <a:gd name="adj" fmla="val 50000"/>
+            </a:avLst>
+          </a:prstGeom>
+          <a:solidFill>
+            <a:srgbClr val="2563EB"/>
+          </a:solidFill>
+          <a:ln>
+            <a:noFill/>
+          </a:ln>
+          <a:effectLst/>
+        </p:spPr>
+        <p:style>
+          <a:lnRef idx="1">
+            <a:schemeClr val="accent1"/>
+          </a:lnRef>
+          <a:fillRef idx="3">
+            <a:schemeClr val="accent1"/>
+          </a:fillRef>
+          <a:effectRef idx="2">
+            <a:schemeClr val="accent1"/>
+          </a:effectRef>
+          <a:fontRef idx="minor">
+            <a:schemeClr val="lt1"/>
+          </a:fontRef>
+        </p:style>
+        <p:txBody>
+          <a:bodyPr rtlCol="0" anchor="ctr"/>
+          <a:lstStyle/>
+          <a:p>
+            <a:pPr algn="ctr"/>
+          </a:p>
+        </p:txBody>
+      </p:sp>
+      <p:sp>
+        <p:nvSpPr>
+          <p:cNvPr id="16" name="TextBox 15"/>
+          <p:cNvSpPr txBox="1"/>
+          <p:nvPr/>
+        </p:nvSpPr>
+        <p:spPr>
+          <a:xfrm>
+            <a:off x="1371600" y="5056631"/>
+            <a:ext cx="9784080" cy="704087"/>
+          </a:xfrm>
+          <a:prstGeom prst="rect">
+            <a:avLst/>
+          </a:prstGeom>
+          <a:noFill/>
+        </p:spPr>
+        <p:txBody>
+          <a:bodyPr wrap="square" anchor="ctr" lIns="0" rIns="0" tIns="0" bIns="0">
+            <a:spAutoFit/>
+          </a:bodyPr>
+          <a:lstStyle/>
+          <a:p>
+            <a:pPr algn="l">
+              <a:lnSpc>
+                <a:spcPct val="102000"/>
+              </a:lnSpc>
+              <a:spcAft>
+                <a:spcPts val="300"/>
+              </a:spcAft>
+            </a:pPr>
+            <a:r>
+              <a:rPr sz="1700" b="1" i="0">
+                <a:solidFill>
+                  <a:srgbClr val="1D2433"/>
+                </a:solidFill>
+                <a:latin typeface="Calibri"/>
+              </a:rPr>
+              <a:t>Planets do not twinkle noticeably</a:t>
+            </a:r>
+          </a:p>
+          <a:p>
+            <a:pPr algn="l">
+              <a:lnSpc>
+                <a:spcPct val="102000"/>
+              </a:lnSpc>
+              <a:spcAft>
+                <a:spcPts val="300"/>
+              </a:spcAft>
+            </a:pPr>
+            <a:r>
+              <a:rPr sz="1350" b="0" i="0">
                 <a:solidFill>
                   <a:srgbClr val="6B7280"/>
                 </a:solidFill>
@@ -27478,8 +28459,8 @@
         </p:nvSpPr>
         <p:spPr>
           <a:xfrm>
-            <a:off x="1143000" y="2057400"/>
-            <a:ext cx="5029200" cy="411480"/>
+            <a:off x="1188720" y="2103120"/>
+            <a:ext cx="5029200" cy="457200"/>
           </a:xfrm>
           <a:prstGeom prst="rect">
             <a:avLst/>
@@ -27513,8 +28494,8 @@
         </p:nvSpPr>
         <p:spPr>
           <a:xfrm>
-            <a:off x="1143000" y="2606040"/>
-            <a:ext cx="5074920" cy="3063240"/>
+            <a:off x="1188720" y="2697480"/>
+            <a:ext cx="5029200" cy="3108959"/>
           </a:xfrm>
           <a:prstGeom prst="rect">
             <a:avLst/>
@@ -27529,14 +28510,14 @@
           <a:p>
             <a:pPr algn="l">
               <a:lnSpc>
-                <a:spcPct val="105000"/>
+                <a:spcPct val="106000"/>
               </a:lnSpc>
               <a:spcAft>
                 <a:spcPts val="900"/>
               </a:spcAft>
             </a:pPr>
             <a:r>
-              <a:rPr sz="1500" b="1" i="0">
+              <a:rPr sz="1400" b="1" i="0">
                 <a:solidFill>
                   <a:srgbClr val="0A9396"/>
                 </a:solidFill>
@@ -27545,26 +28526,26 @@
               <a:t>•  </a:t>
             </a:r>
             <a:r>
-              <a:rPr sz="1500" b="0" i="0">
+              <a:rPr sz="1400" b="0" i="0">
                 <a:solidFill>
                   <a:srgbClr val="1D2433"/>
                 </a:solidFill>
                 <a:latin typeface="Calibri"/>
               </a:rPr>
-              <a:t>When light passes from one transparent medium into another, it changes speed and bends at the boundary — this is refraction.</a:t>
+              <a:t>Light bends when it crosses between two media — refraction</a:t>
             </a:r>
           </a:p>
           <a:p>
             <a:pPr algn="l">
               <a:lnSpc>
-                <a:spcPct val="105000"/>
+                <a:spcPct val="106000"/>
               </a:lnSpc>
               <a:spcAft>
                 <a:spcPts val="900"/>
               </a:spcAft>
             </a:pPr>
             <a:r>
-              <a:rPr sz="1500" b="1" i="0">
+              <a:rPr sz="1400" b="1" i="0">
                 <a:solidFill>
                   <a:srgbClr val="0A9396"/>
                 </a:solidFill>
@@ -27573,26 +28554,26 @@
               <a:t>•  </a:t>
             </a:r>
             <a:r>
-              <a:rPr sz="1500" b="0" i="0">
+              <a:rPr sz="1400" b="0" i="0">
                 <a:solidFill>
                   <a:srgbClr val="1D2433"/>
                 </a:solidFill>
                 <a:latin typeface="Calibri"/>
               </a:rPr>
-              <a:t>Light bends towards the normal when it enters a denser medium (e.g. air to glass), and away from the normal when it enters a rarer medium (e.g. glass to air).</a:t>
+              <a:t>Into a denser medium → bends towards the normal</a:t>
             </a:r>
           </a:p>
           <a:p>
             <a:pPr algn="l">
               <a:lnSpc>
-                <a:spcPct val="105000"/>
+                <a:spcPct val="106000"/>
               </a:lnSpc>
               <a:spcAft>
                 <a:spcPts val="900"/>
               </a:spcAft>
             </a:pPr>
             <a:r>
-              <a:rPr sz="1500" b="1" i="0">
+              <a:rPr sz="1400" b="1" i="0">
                 <a:solidFill>
                   <a:srgbClr val="0A9396"/>
                 </a:solidFill>
@@ -27601,26 +28582,26 @@
               <a:t>•  </a:t>
             </a:r>
             <a:r>
-              <a:rPr sz="1500" b="0" i="0">
+              <a:rPr sz="1400" b="0" i="0">
                 <a:solidFill>
                   <a:srgbClr val="1D2433"/>
                 </a:solidFill>
                 <a:latin typeface="Calibri"/>
               </a:rPr>
-              <a:t>A ray travelling exactly along the normal does not bend at all, though its speed still changes.</a:t>
+              <a:t>Into a rarer medium → bends away from the normal</a:t>
             </a:r>
           </a:p>
           <a:p>
             <a:pPr algn="l">
               <a:lnSpc>
-                <a:spcPct val="105000"/>
+                <a:spcPct val="106000"/>
               </a:lnSpc>
               <a:spcAft>
                 <a:spcPts val="900"/>
               </a:spcAft>
             </a:pPr>
             <a:r>
-              <a:rPr sz="1500" b="1" i="0">
+              <a:rPr sz="1400" b="1" i="0">
                 <a:solidFill>
                   <a:srgbClr val="0A9396"/>
                 </a:solidFill>
@@ -27629,13 +28610,41 @@
               <a:t>•  </a:t>
             </a:r>
             <a:r>
-              <a:rPr sz="1500" b="0" i="0">
+              <a:rPr sz="1400" b="0" i="0">
                 <a:solidFill>
                   <a:srgbClr val="1D2433"/>
                 </a:solidFill>
                 <a:latin typeface="Calibri"/>
               </a:rPr>
-              <a:t>Refraction happens because the speed of light is different in different media; the frequency stays the same but the wavelength changes.</a:t>
+              <a:t>Along the normal → no bending</a:t>
+            </a:r>
+          </a:p>
+          <a:p>
+            <a:pPr algn="l">
+              <a:lnSpc>
+                <a:spcPct val="106000"/>
+              </a:lnSpc>
+              <a:spcAft>
+                <a:spcPts val="900"/>
+              </a:spcAft>
+            </a:pPr>
+            <a:r>
+              <a:rPr sz="1400" b="1" i="0">
+                <a:solidFill>
+                  <a:srgbClr val="0A9396"/>
+                </a:solidFill>
+                <a:latin typeface="Calibri"/>
+              </a:rPr>
+              <a:t>•  </a:t>
+            </a:r>
+            <a:r>
+              <a:rPr sz="1400" b="0" i="0">
+                <a:solidFill>
+                  <a:srgbClr val="1D2433"/>
+                </a:solidFill>
+                <a:latin typeface="Calibri"/>
+              </a:rPr>
+              <a:t>Cause: light travels at a different speed in each medium</a:t>
             </a:r>
           </a:p>
         </p:txBody>
